--- a/labs/Lab03/slides.pptx
+++ b/labs/Lab03/slides.pptx
@@ -772,7 +772,7 @@
           <a:p>
             <a:r>
               <a:rPr lang="en-US" dirty="0"/>
-              <a:t>Stage 1 supplied transport only. Preserve provider-independent YAML behavior and tests.</a:t>
+              <a:t>Stage 1 included your own text-completion client. Preserve provider-independent YAML behavior and tests.</a:t>
             </a:r>
             <a:endParaRPr lang="en-US" dirty="0"/>
           </a:p>
